--- a/docs/exports/Oct12_session3.pptx
+++ b/docs/exports/Oct12_session3.pptx
@@ -44,6 +44,8 @@
     <p:sldId id="292" r:id="rId44"/>
     <p:sldId id="293" r:id="rId45"/>
     <p:sldId id="294" r:id="rId46"/>
+    <p:sldId id="295" r:id="rId47"/>
+    <p:sldId id="296" r:id="rId48"/>
   </p:sldIdLst>
   <p:sldSz cx="12192000" cy="6858000" type="screen4x3"/>
   <p:notesSz cx="6858000" cy="9144000"/>
@@ -666,7 +668,7 @@
           <a:lstStyle/>
           <a:p>
             <a:r>
-              <a:t>Paper (Oct12_session3_materials.docx): Hand out the AI handout (pack page 2, one per pair). The better prompt is printed below the flawed paragraph.</a:t>
+              <a:t>Paper (Oct12_session3_materials.docx): Tracker: record the interval counted by neighbourhood and whether it clears 1,000 AED.</a:t>
             </a:r>
           </a:p>
           <a:p/>
@@ -787,7 +789,7 @@
           <a:lstStyle/>
           <a:p>
             <a:r>
-              <a:t>If someone asks why we did not simply ask the AI to explain before-and-after bias: current models answer that general question well. The short prompt is closer to what people type when they are busy.</a:t>
+              <a:t>Same seed each time, so the subset at a given size is stable while you talk. Measured: 196 neighbourhoods 1,014 [935, 1,093]; 60 gives 1,022 [864, 1,179]; 20 gives 940 [591, 1,289]. Link back to Session 1: a study that is too small may fail to find a real effect.</a:t>
             </a:r>
           </a:p>
           <a:p/>
@@ -908,7 +910,7 @@
           <a:lstStyle/>
           <a:p>
             <a:r>
-              <a:t>OPTIONAL. If time is short, skip this slide and go straight to the questions on the next one. If you run it: give three minutes, then reveal the list and ask what the AI missed, what it added that is worth keeping, and whether anything it suggested was incorrect.</a:t>
+              <a:t>Paper (Oct12_session3_materials.docx): Hand out the AI handout (pack page 2, one per pair). The better prompt is printed below the flawed paragraph.</a:t>
             </a:r>
           </a:p>
           <a:p/>
@@ -1029,6 +1031,248 @@
           <a:lstStyle/>
           <a:p>
             <a:r>
+              <a:t>If someone asks why we did not simply ask the AI to explain before-and-after bias: current models answer that general question well. The short prompt is closer to what people type when they are busy.</a:t>
+            </a:r>
+          </a:p>
+          <a:p/>
+          <a:p>
+            <a:r>
+              <a:t>span.MJX_Assistive_MathML {</a:t>
+            </a:r>
+          </a:p>
+          <a:p>
+            <a:r>
+              <a:t>position:absolute!important;</a:t>
+            </a:r>
+          </a:p>
+          <a:p>
+            <a:r>
+              <a:t>clip: rect(1px, 1px, 1px, 1px);</a:t>
+            </a:r>
+          </a:p>
+          <a:p>
+            <a:r>
+              <a:t>padding: 1px 0 0 0!important;</a:t>
+            </a:r>
+          </a:p>
+          <a:p>
+            <a:r>
+              <a:t>border: 0!important;</a:t>
+            </a:r>
+          </a:p>
+          <a:p>
+            <a:r>
+              <a:t>height: 1px!important;</a:t>
+            </a:r>
+          </a:p>
+          <a:p>
+            <a:r>
+              <a:t>width: 1px!important;</a:t>
+            </a:r>
+          </a:p>
+          <a:p>
+            <a:r>
+              <a:t>overflow: hidden!important;</a:t>
+            </a:r>
+          </a:p>
+          <a:p>
+            <a:r>
+              <a:t>display:block!important;</a:t>
+            </a:r>
+          </a:p>
+          <a:p>
+            <a:r>
+              <a:t>}</a:t>
+            </a:r>
+          </a:p>
+        </p:txBody>
+      </p:sp>
+      <p:sp>
+        <p:nvSpPr>
+          <p:cNvPr id="4" name="Slide Number Placeholder 3"/>
+          <p:cNvSpPr>
+            <a:spLocks noGrp="1"/>
+          </p:cNvSpPr>
+          <p:nvPr>
+            <p:ph type="sldNum" idx="5" sz="quarter"/>
+          </p:nvPr>
+        </p:nvSpPr>
+        <p:spPr/>
+      </p:sp>
+    </p:spTree>
+  </p:cSld>
+  <p:clrMapOvr>
+    <a:masterClrMapping/>
+  </p:clrMapOvr>
+</p:notes>
+</file>
+
+<file path=ppt/notesSlides/notesSlide14.xml><?xml version="1.0" encoding="utf-8"?>
+<p:notes xmlns:a="http://schemas.openxmlformats.org/drawingml/2006/main" xmlns:p="http://schemas.openxmlformats.org/presentationml/2006/main" xmlns:r="http://schemas.openxmlformats.org/officeDocument/2006/relationships">
+  <p:cSld>
+    <p:spTree>
+      <p:nvGrpSpPr>
+        <p:cNvPr id="1" name=""/>
+        <p:cNvGrpSpPr/>
+        <p:nvPr/>
+      </p:nvGrpSpPr>
+      <p:grpSpPr>
+        <a:xfrm>
+          <a:off x="0" y="0"/>
+          <a:ext cx="0" cy="0"/>
+          <a:chOff x="0" y="0"/>
+          <a:chExt cx="0" cy="0"/>
+        </a:xfrm>
+      </p:grpSpPr>
+      <p:sp>
+        <p:nvSpPr>
+          <p:cNvPr id="2" name="Slide Image Placeholder 1"/>
+          <p:cNvSpPr>
+            <a:spLocks noGrp="1"/>
+          </p:cNvSpPr>
+          <p:nvPr>
+            <p:ph type="sldImg" idx="2"/>
+          </p:nvPr>
+        </p:nvSpPr>
+        <p:spPr/>
+      </p:sp>
+      <p:sp>
+        <p:nvSpPr>
+          <p:cNvPr id="3" name="Notes Placeholder 2"/>
+          <p:cNvSpPr>
+            <a:spLocks noGrp="1"/>
+          </p:cNvSpPr>
+          <p:nvPr>
+            <p:ph type="body" idx="3" sz="quarter"/>
+          </p:nvPr>
+        </p:nvSpPr>
+        <p:spPr/>
+        <p:txBody>
+          <a:bodyPr/>
+          <a:lstStyle/>
+          <a:p>
+            <a:r>
+              <a:t>OPTIONAL. If time is short, skip this slide and go straight to the questions on the next one. If you run it: give three minutes, then reveal the list and ask what the AI missed, what it added that is worth keeping, and whether anything it suggested was incorrect.</a:t>
+            </a:r>
+          </a:p>
+          <a:p/>
+          <a:p>
+            <a:r>
+              <a:t>span.MJX_Assistive_MathML {</a:t>
+            </a:r>
+          </a:p>
+          <a:p>
+            <a:r>
+              <a:t>position:absolute!important;</a:t>
+            </a:r>
+          </a:p>
+          <a:p>
+            <a:r>
+              <a:t>clip: rect(1px, 1px, 1px, 1px);</a:t>
+            </a:r>
+          </a:p>
+          <a:p>
+            <a:r>
+              <a:t>padding: 1px 0 0 0!important;</a:t>
+            </a:r>
+          </a:p>
+          <a:p>
+            <a:r>
+              <a:t>border: 0!important;</a:t>
+            </a:r>
+          </a:p>
+          <a:p>
+            <a:r>
+              <a:t>height: 1px!important;</a:t>
+            </a:r>
+          </a:p>
+          <a:p>
+            <a:r>
+              <a:t>width: 1px!important;</a:t>
+            </a:r>
+          </a:p>
+          <a:p>
+            <a:r>
+              <a:t>overflow: hidden!important;</a:t>
+            </a:r>
+          </a:p>
+          <a:p>
+            <a:r>
+              <a:t>display:block!important;</a:t>
+            </a:r>
+          </a:p>
+          <a:p>
+            <a:r>
+              <a:t>}</a:t>
+            </a:r>
+          </a:p>
+        </p:txBody>
+      </p:sp>
+      <p:sp>
+        <p:nvSpPr>
+          <p:cNvPr id="4" name="Slide Number Placeholder 3"/>
+          <p:cNvSpPr>
+            <a:spLocks noGrp="1"/>
+          </p:cNvSpPr>
+          <p:nvPr>
+            <p:ph type="sldNum" idx="5" sz="quarter"/>
+          </p:nvPr>
+        </p:nvSpPr>
+        <p:spPr/>
+      </p:sp>
+    </p:spTree>
+  </p:cSld>
+  <p:clrMapOvr>
+    <a:masterClrMapping/>
+  </p:clrMapOvr>
+</p:notes>
+</file>
+
+<file path=ppt/notesSlides/notesSlide15.xml><?xml version="1.0" encoding="utf-8"?>
+<p:notes xmlns:a="http://schemas.openxmlformats.org/drawingml/2006/main" xmlns:p="http://schemas.openxmlformats.org/presentationml/2006/main" xmlns:r="http://schemas.openxmlformats.org/officeDocument/2006/relationships">
+  <p:cSld>
+    <p:spTree>
+      <p:nvGrpSpPr>
+        <p:cNvPr id="1" name=""/>
+        <p:cNvGrpSpPr/>
+        <p:nvPr/>
+      </p:nvGrpSpPr>
+      <p:grpSpPr>
+        <a:xfrm>
+          <a:off x="0" y="0"/>
+          <a:ext cx="0" cy="0"/>
+          <a:chOff x="0" y="0"/>
+          <a:chExt cx="0" cy="0"/>
+        </a:xfrm>
+      </p:grpSpPr>
+      <p:sp>
+        <p:nvSpPr>
+          <p:cNvPr id="2" name="Slide Image Placeholder 1"/>
+          <p:cNvSpPr>
+            <a:spLocks noGrp="1"/>
+          </p:cNvSpPr>
+          <p:nvPr>
+            <p:ph type="sldImg" idx="2"/>
+          </p:nvPr>
+        </p:nvSpPr>
+        <p:spPr/>
+      </p:sp>
+      <p:sp>
+        <p:nvSpPr>
+          <p:cNvPr id="3" name="Notes Placeholder 2"/>
+          <p:cNvSpPr>
+            <a:spLocks noGrp="1"/>
+          </p:cNvSpPr>
+          <p:nvPr>
+            <p:ph type="body" idx="3" sz="quarter"/>
+          </p:nvPr>
+        </p:nvSpPr>
+        <p:spPr/>
+        <p:txBody>
+          <a:bodyPr/>
+          <a:lstStyle/>
+          <a:p>
+            <a:r>
               <a:t>Paper (Oct12_session3_materials.docx): Hand out the take-away cards (pack page 3). Give a minute to fill in “On my desk” on the card, then take two or three examples from the room.</a:t>
             </a:r>
           </a:p>
@@ -1513,7 +1757,7 @@
           <a:lstStyle/>
           <a:p>
             <a:r>
-              <a:t>Paper (Oct12_session3_materials.docx): Tracker: record the largest gap after five draws, then the gap when officials pick.</a:t>
+              <a:t>About 5 minutes. With every slider at zero both estimates sit on the truth: a naive comparison is only wrong when the world has these problems, and the real GreenWaste had them. Move one slider at a time and take a call first. “Costs rise anyway” moves only before-and-after (towards zero, as in the real data, where costs rose about 150 AED). The two “joiners differ” sliders move only with-and-without, and make it look bigger than the truth, as the 1,447 did. Leave the sliders where the room ends up; the lab comes back after the lottery.</a:t>
             </a:r>
           </a:p>
           <a:p/>
@@ -1634,7 +1878,7 @@
           <a:lstStyle/>
           <a:p>
             <a:r>
-              <a:t>At 4 the gaps run to hundreds of AED either way; at ~196 almost every draw starts within a few dozen. This is “two people versus two crowds” from Module 1, seen in the data. The same holds for characteristics nobody measured.</a:t>
+              <a:t>Paper (Oct12_session3_materials.docx): Tracker: record the largest gap after five draws, then the gap when officials pick.</a:t>
             </a:r>
           </a:p>
           <a:p/>
@@ -1755,7 +1999,7 @@
           <a:lstStyle/>
           <a:p>
             <a:r>
-              <a:t>This asks the room to apply what the two lottery slides showed to a result they might be handed. Expect a split between A and B; let one person from each argue before revealing.</a:t>
+              <a:t>At 4 the gaps run to hundreds of AED either way; at ~196 almost every draw starts within a few dozen. This is “two people versus two crowds” from Module 1, seen in the data. The same holds for characteristics nobody measured.</a:t>
             </a:r>
           </a:p>
           <a:p/>
@@ -1876,7 +2120,7 @@
           <a:lstStyle/>
           <a:p>
             <a:r>
-              <a:t>Paper (Oct12_session3_materials.docx): Tracker: record the interval counted by neighbourhood and whether it clears 1,000 AED.</a:t>
+              <a:t>This asks the room to apply what the two lottery slides showed to a result they might be handed. Expect a split between A and B; let one person from each argue before revealing.</a:t>
             </a:r>
           </a:p>
           <a:p/>
@@ -1997,7 +2241,7 @@
           <a:lstStyle/>
           <a:p>
             <a:r>
-              <a:t>Same seed each time, so the subset at a given size is stable while you talk. Measured: 196 neighbourhoods 1,014 [935, 1,093]; 60 gives 1,022 [864, 1,179]; 20 gives 940 [591, 1,289]. Link back to Session 1: a study that is too small may fail to find a real effect.</a:t>
+              <a:t>About 3 minutes. The sliders start with all three problems switched on. This chart comes back in every method session with one more method added: difference-in-differences tomorrow morning, then regression discontinuity, then matching. Each new method will survive some sliders and not others; only the lottery survives them all.</a:t>
             </a:r>
           </a:p>
           <a:p/>
@@ -6472,6 +6716,90 @@
 </p:sld>
 </file>
 
+<file path=ppt/slides/slide40.xml><?xml version="1.0" encoding="utf-8"?>
+<p:sld xmlns:a="http://schemas.openxmlformats.org/drawingml/2006/main" xmlns:p="http://schemas.openxmlformats.org/presentationml/2006/main" xmlns:r="http://schemas.openxmlformats.org/officeDocument/2006/relationships">
+  <p:cSld>
+    <p:spTree>
+      <p:nvGrpSpPr>
+        <p:cNvPr id="1" name=""/>
+        <p:cNvGrpSpPr/>
+        <p:nvPr/>
+      </p:nvGrpSpPr>
+      <p:grpSpPr/>
+      <p:pic>
+        <p:nvPicPr>
+          <p:cNvPr id="2" name="Picture 1" descr="s040.jpg"/>
+          <p:cNvPicPr>
+            <a:picLocks noChangeAspect="1"/>
+          </p:cNvPicPr>
+          <p:nvPr/>
+        </p:nvPicPr>
+        <p:blipFill>
+          <a:blip r:embed="rId2"/>
+          <a:stretch>
+            <a:fillRect/>
+          </a:stretch>
+        </p:blipFill>
+        <p:spPr>
+          <a:xfrm>
+            <a:off x="0" y="0"/>
+            <a:ext cx="12192000" cy="6858000"/>
+          </a:xfrm>
+          <a:prstGeom prst="rect">
+            <a:avLst/>
+          </a:prstGeom>
+        </p:spPr>
+      </p:pic>
+    </p:spTree>
+  </p:cSld>
+  <p:clrMapOvr>
+    <a:masterClrMapping/>
+  </p:clrMapOvr>
+</p:sld>
+</file>
+
+<file path=ppt/slides/slide41.xml><?xml version="1.0" encoding="utf-8"?>
+<p:sld xmlns:a="http://schemas.openxmlformats.org/drawingml/2006/main" xmlns:p="http://schemas.openxmlformats.org/presentationml/2006/main" xmlns:r="http://schemas.openxmlformats.org/officeDocument/2006/relationships">
+  <p:cSld>
+    <p:spTree>
+      <p:nvGrpSpPr>
+        <p:cNvPr id="1" name=""/>
+        <p:cNvGrpSpPr/>
+        <p:nvPr/>
+      </p:nvGrpSpPr>
+      <p:grpSpPr/>
+      <p:pic>
+        <p:nvPicPr>
+          <p:cNvPr id="2" name="Picture 1" descr="s041.jpg"/>
+          <p:cNvPicPr>
+            <a:picLocks noChangeAspect="1"/>
+          </p:cNvPicPr>
+          <p:nvPr/>
+        </p:nvPicPr>
+        <p:blipFill>
+          <a:blip r:embed="rId2"/>
+          <a:stretch>
+            <a:fillRect/>
+          </a:stretch>
+        </p:blipFill>
+        <p:spPr>
+          <a:xfrm>
+            <a:off x="0" y="0"/>
+            <a:ext cx="12192000" cy="6858000"/>
+          </a:xfrm>
+          <a:prstGeom prst="rect">
+            <a:avLst/>
+          </a:prstGeom>
+        </p:spPr>
+      </p:pic>
+    </p:spTree>
+  </p:cSld>
+  <p:clrMapOvr>
+    <a:masterClrMapping/>
+  </p:clrMapOvr>
+</p:sld>
+</file>
+
 <file path=ppt/slides/slide5.xml><?xml version="1.0" encoding="utf-8"?>
 <p:sld xmlns:a="http://schemas.openxmlformats.org/drawingml/2006/main" xmlns:p="http://schemas.openxmlformats.org/presentationml/2006/main" xmlns:r="http://schemas.openxmlformats.org/officeDocument/2006/relationships">
   <p:cSld>
